--- a/lecons/LSA/Climatology/LSA_CLIM_L11_Forms_of_Condensation_and_Precipitation.pptx
+++ b/lecons/LSA/Climatology/LSA_CLIM_L11_Forms_of_Condensation_and_Precipitation.pptx
@@ -3027,7 +3027,7 @@
           <a:p>
             <a:r>
               <a:rPr lang="en-US" dirty="0"/>
-              <a:t>Let us copy DEFINITIONS. The key terms of this lesson are defined as follows. Write each point on a new line, with the key term first. When you finish, we go to the next slide.</a:t>
+              <a:t>Let us copy the definitions. The key terms of this lesson are defined as follows. On this slide we have Condensation. Write each point on a new line, with the key term first, and explain it in your own words when we revise. When you finish, we go to the next slide.</a:t>
             </a:r>
             <a:endParaRPr lang="en-US" dirty="0"/>
           </a:p>
@@ -3115,7 +3115,7 @@
           <a:p>
             <a:r>
               <a:rPr lang="en-US" dirty="0"/>
-              <a:t>We continue with the same part. Write each point on a new line, with the key term first.</a:t>
+              <a:t>We continue with the definitions. On this slide we have Precipitation and Dew point. Write each point on a new line, with the key term first, and explain it in your own words when we revise.</a:t>
             </a:r>
             <a:endParaRPr lang="en-US" dirty="0"/>
           </a:p>
@@ -3203,7 +3203,7 @@
           <a:p>
             <a:r>
               <a:rPr lang="en-US" dirty="0"/>
-              <a:t>Let us copy Clouds. Clouds are classified by height and shape. Write each point on a new line, with the key term first. When you finish, we go to the next slide.</a:t>
+              <a:t>Let us copy Clouds. Clouds are classified by height and shape. On this slide we have High clouds (above 6 km). Write each point on a new line, with the key term first, and explain it in your own words when we revise. When you finish, we go to the next slide.</a:t>
             </a:r>
             <a:endParaRPr lang="en-US" dirty="0"/>
           </a:p>
@@ -3291,7 +3291,7 @@
           <a:p>
             <a:r>
               <a:rPr lang="en-US" dirty="0"/>
-              <a:t>We continue with the same part. Write each point on a new line, with the key term first. When you finish, we go to the next slide.</a:t>
+              <a:t>We continue with Clouds. On this slide we have Middle clouds (2–6 km). Write each point on a new line, with the key term first, and explain it in your own words when we revise. When you finish, we go to the next slide.</a:t>
             </a:r>
             <a:endParaRPr lang="en-US" dirty="0"/>
           </a:p>
@@ -3379,7 +3379,7 @@
           <a:p>
             <a:r>
               <a:rPr lang="en-US" dirty="0"/>
-              <a:t>We continue with the same part. Write each point on a new line, with the key term first.</a:t>
+              <a:t>We continue with Clouds. On this slide we have Low and vertical clouds. Write each point on a new line, with the key term first, and explain it in your own words when we revise.</a:t>
             </a:r>
             <a:endParaRPr lang="en-US" dirty="0"/>
           </a:p>
@@ -3643,7 +3643,7 @@
           <a:p>
             <a:r>
               <a:rPr lang="en-US" dirty="0"/>
-              <a:t>Let us copy Fog, Mist and Dew. Condensation near the ground includes. Write each point on a new line, with the key term first. When you finish, we go to the next slide.</a:t>
+              <a:t>Let us copy Fog, Mist and Dew. Condensation near the ground includes. On this slide we have Fog and mist. Write each point on a new line, with the key term first, and explain it in your own words when we revise. When you finish, we go to the next slide.</a:t>
             </a:r>
             <a:endParaRPr lang="en-US" dirty="0"/>
           </a:p>
@@ -3731,7 +3731,7 @@
           <a:p>
             <a:r>
               <a:rPr lang="en-US" dirty="0"/>
-              <a:t>We continue with the same part. Write each point on a new line, with the key term first.</a:t>
+              <a:t>We continue with Fog, Mist and Dew. On this slide we have Dew. Write each point on a new line, with the key term first, and explain it in your own words when we revise.</a:t>
             </a:r>
             <a:endParaRPr lang="en-US" dirty="0"/>
           </a:p>
@@ -3819,7 +3819,7 @@
           <a:p>
             <a:r>
               <a:rPr lang="en-US" dirty="0"/>
-              <a:t>Let us copy Solid and Gaseous Forms. Solid forms of precipitation include. Write each point on a new line, with the key term first. When you finish, we go to the next slide.</a:t>
+              <a:t>Let us copy Solid and Gaseous Forms. Solid forms of precipitation include. On this slide we have Snow and sleet. Write each point on a new line, with the key term first, and explain it in your own words when we revise. When you finish, we go to the next slide.</a:t>
             </a:r>
             <a:endParaRPr lang="en-US" dirty="0"/>
           </a:p>
@@ -3907,7 +3907,7 @@
           <a:p>
             <a:r>
               <a:rPr lang="en-US" dirty="0"/>
-              <a:t>We continue with the same part. Write each point on a new line, with the key term first. When you finish, we go to the next slide.</a:t>
+              <a:t>We continue with Solid and Gaseous Forms. On this slide we have Hail and Frost and rime. Write each point on a new line, with the key term first, and explain it in your own words when we revise. When you finish, we go to the next slide.</a:t>
             </a:r>
             <a:endParaRPr lang="en-US" dirty="0"/>
           </a:p>
@@ -3995,7 +3995,7 @@
           <a:p>
             <a:r>
               <a:rPr lang="en-US" dirty="0"/>
-              <a:t>We continue with the same part. Write each point on a new line, with the key term first.</a:t>
+              <a:t>We continue with Solid and Gaseous Forms. On this slide we have Gaseous forms. Write each point on a new line, with the key term first, and explain it in your own words when we revise.</a:t>
             </a:r>
             <a:endParaRPr lang="en-US" dirty="0"/>
           </a:p>
@@ -4083,7 +4083,7 @@
           <a:p>
             <a:r>
               <a:rPr lang="en-US" dirty="0"/>
-              <a:t>Let us copy Liquid Forms: Rainfall. Rain forms when air rises, cools and condenses; there are three types. Write each point on a new line, with the key term first. When you finish, we go to the next slide.</a:t>
+              <a:t>Let us copy Liquid Forms: Rainfall. Rain forms when air rises, cools and condenses; there are three types. On this slide we have Convectional rain. Write each point on a new line, with the key term first, and explain it in your own words when we revise. When you finish, we go to the next slide.</a:t>
             </a:r>
             <a:endParaRPr lang="en-US" dirty="0"/>
           </a:p>
@@ -4171,7 +4171,7 @@
           <a:p>
             <a:r>
               <a:rPr lang="en-US" dirty="0"/>
-              <a:t>We continue with the same part. Write each point on a new line, with the key term first. When you finish, we go to the next slide.</a:t>
+              <a:t>We continue with Liquid Forms: Rainfall. Copy this carefully. When you finish, we go to the next slide.</a:t>
             </a:r>
             <a:endParaRPr lang="en-US" dirty="0"/>
           </a:p>
@@ -4259,7 +4259,7 @@
           <a:p>
             <a:r>
               <a:rPr lang="en-US" dirty="0"/>
-              <a:t>We continue with the same part. Write each point on a new line, with the key term first. When you finish, we go to the next slide.</a:t>
+              <a:t>We continue with Liquid Forms: Rainfall. On this slide we have Orographic (relief) rain. Write each point on a new line, with the key term first, and explain it in your own words when we revise. When you finish, we go to the next slide.</a:t>
             </a:r>
             <a:endParaRPr lang="en-US" dirty="0"/>
           </a:p>
@@ -4347,7 +4347,7 @@
           <a:p>
             <a:r>
               <a:rPr lang="en-US" dirty="0"/>
-              <a:t>We continue with the same part. Write each point on a new line, with the key term first.</a:t>
+              <a:t>We continue with Liquid Forms: Rainfall. On this slide we have Cyclonic (frontal) rain. Write each point on a new line, with the key term first, and explain it in your own words when we revise.</a:t>
             </a:r>
             <a:endParaRPr lang="en-US" dirty="0"/>
           </a:p>
@@ -5403,7 +5403,7 @@
           <a:p>
             <a:r>
               <a:rPr lang="en-US" dirty="0"/>
-              <a:t>Here is the plan of our lesson today. We shall correction of the homework; then objectives and recall; then real-life situation and action to take; then learning activities; then board summary; then evaluation, remediation and homework.</a:t>
+              <a:t>Here is the plan of our lesson today. First, we shall correct the homework. Then we shall look at the objectives and recall what you already know. After that, we shall study a situation from real life and the action to take, and do the learning activities. Finally, we shall copy the board summary, do the evaluation and the remediation, and I will give you the homework.</a:t>
             </a:r>
             <a:endParaRPr lang="en-US" dirty="0"/>
           </a:p>
@@ -7207,7 +7207,7 @@
                 <a:ea typeface="Times New Roman" pitchFamily="34" charset="-122"/>
                 <a:cs typeface="Times New Roman" pitchFamily="34" charset="-120"/>
               </a:rPr>
-              <a:t>Lesson 11: Forms of Condensation and Precipitation</a:t>
+              <a:t>Lesson 11</a:t>
             </a:r>
             <a:endParaRPr lang="en-US" sz="2600" dirty="0"/>
           </a:p>
